--- a/assets/pptx/catalog-463.pptx
+++ b/assets/pptx/catalog-463.pptx
@@ -3266,7 +3266,7 @@
                 <a:ea typeface="Ebrima"/>
                 <a:cs typeface="Ebrima"/>
               </a:rPr>
-              <a:t>ከሰማይ ወርዶ እኛን ከአዳነ (2x)</a:t>
+              <a:t>ከሰማይ ወርዶ እኛን ከአዳነ 2x</a:t>
             </a:r>
           </a:p>
           <a:p>
@@ -3284,7 +3284,7 @@
                 <a:ea typeface="Ebrima"/>
                 <a:cs typeface="Ebrima"/>
               </a:rPr>
-              <a:t>ኧረ እንዲህም አለ አምልኮ ኧረ እንዲህም አለ (2x)</a:t>
+              <a:t>ኧረ እንዲህም አለ አምልኮ ኧረ እንዲህም አለ 2x</a:t>
             </a:r>
           </a:p>
           <a:p>
@@ -3302,7 +3302,7 @@
                 <a:ea typeface="Ebrima"/>
                 <a:cs typeface="Ebrima"/>
               </a:rPr>
-              <a:t>ኧረ እንዲህም አለ ዕልልታ ኧረ እንዲህም አለ (2x)</a:t>
+              <a:t>ኧረ እንዲህም አለ ዕልልታ ኧረ እንዲህም አለ 2x</a:t>
             </a:r>
           </a:p>
         </p:txBody>
@@ -3459,7 +3459,7 @@
                 <a:ea typeface="Ebrima"/>
                 <a:cs typeface="Ebrima"/>
               </a:rPr>
-              <a:t>ሰይጣን ስሙ አቃጠለው (2x)</a:t>
+              <a:t>ሰይጣን ስሙ አቃጠለው 2x</a:t>
             </a:r>
           </a:p>
         </p:txBody>
@@ -3526,7 +3526,7 @@
                 <a:ea typeface="Ebrima"/>
                 <a:cs typeface="Ebrima"/>
               </a:rPr>
-              <a:t>ኧረ ይሁን ሽብሸባ ኧረ ይሁን (2x)</a:t>
+              <a:t>ኧረ ይሁን ሽብሸባ ኧረ ይሁን 2x</a:t>
             </a:r>
           </a:p>
           <a:p>
@@ -3562,7 +3562,7 @@
                 <a:ea typeface="Ebrima"/>
                 <a:cs typeface="Ebrima"/>
               </a:rPr>
-              <a:t>አምላክ አናውቅም ሌላ ሌላ (2x)</a:t>
+              <a:t>አምላክ አናውቅም ሌላ ሌላ 2x</a:t>
             </a:r>
           </a:p>
           <a:p>
@@ -3598,7 +3598,7 @@
                 <a:ea typeface="Ebrima"/>
                 <a:cs typeface="Ebrima"/>
               </a:rPr>
-              <a:t>አማላጅ አናውቅም ሌላ (2x)</a:t>
+              <a:t>አማላጅ አናውቅም ሌላ 2x</a:t>
             </a:r>
           </a:p>
         </p:txBody>
@@ -3683,7 +3683,7 @@
                 <a:ea typeface="Ebrima"/>
                 <a:cs typeface="Ebrima"/>
               </a:rPr>
-              <a:t>ከሰማይ ወርዶ እኛን ከአዳነ (2x)</a:t>
+              <a:t>ከሰማይ ወርዶ እኛን ከአዳነ 2x</a:t>
             </a:r>
           </a:p>
           <a:p>
@@ -3701,7 +3701,7 @@
                 <a:ea typeface="Ebrima"/>
                 <a:cs typeface="Ebrima"/>
               </a:rPr>
-              <a:t>ኧረ እንዲህም አለ አምልኮ ኧረ እንዲህም አለ (2x)</a:t>
+              <a:t>ኧረ እንዲህም አለ አምልኮ ኧረ እንዲህም አለ 2x</a:t>
             </a:r>
           </a:p>
           <a:p>
@@ -3719,7 +3719,7 @@
                 <a:ea typeface="Ebrima"/>
                 <a:cs typeface="Ebrima"/>
               </a:rPr>
-              <a:t>ኧረ እንዲህም አለ ዕልልታ ኧረ እንዲህም አለ (2x)</a:t>
+              <a:t>ኧረ እንዲህም አለ ዕልልታ ኧረ እንዲህም አለ 2x</a:t>
             </a:r>
           </a:p>
         </p:txBody>
@@ -3858,7 +3858,7 @@
                 <a:ea typeface="Ebrima"/>
                 <a:cs typeface="Ebrima"/>
               </a:rPr>
-              <a:t>ይባል በዘሬ ይመለክ ዛሬ (2x)</a:t>
+              <a:t>ይባል በዘሬ ይመለክ ዛሬ 2x</a:t>
             </a:r>
           </a:p>
         </p:txBody>
@@ -3925,7 +3925,7 @@
                 <a:ea typeface="Ebrima"/>
                 <a:cs typeface="Ebrima"/>
               </a:rPr>
-              <a:t>ኧረ ይሁን ሽብሸባ ኧረ ይሁን (2x)</a:t>
+              <a:t>ኧረ ይሁን ሽብሸባ ኧረ ይሁን 2x</a:t>
             </a:r>
           </a:p>
           <a:p>
@@ -3961,7 +3961,7 @@
                 <a:ea typeface="Ebrima"/>
                 <a:cs typeface="Ebrima"/>
               </a:rPr>
-              <a:t>አምላክ አናውቅም ሌላ (2x)</a:t>
+              <a:t>አምላክ አናውቅም ሌላ 2x</a:t>
             </a:r>
           </a:p>
           <a:p>
@@ -3997,7 +3997,7 @@
                 <a:ea typeface="Ebrima"/>
                 <a:cs typeface="Ebrima"/>
               </a:rPr>
-              <a:t>አማላጅ አናውቅም ሌላ (2x)</a:t>
+              <a:t>አማላጅ አናውቅም ሌላ 2x</a:t>
             </a:r>
           </a:p>
         </p:txBody>
@@ -4082,7 +4082,7 @@
                 <a:ea typeface="Ebrima"/>
                 <a:cs typeface="Ebrima"/>
               </a:rPr>
-              <a:t>ከሰማይ ወርዶ እኛን ከአዳነ (2x)</a:t>
+              <a:t>ከሰማይ ወርዶ እኛን ከአዳነ 2x</a:t>
             </a:r>
           </a:p>
           <a:p>
@@ -4100,7 +4100,7 @@
                 <a:ea typeface="Ebrima"/>
                 <a:cs typeface="Ebrima"/>
               </a:rPr>
-              <a:t>ኧረ እንዲህም አለ አምልኮ ኧረ እንዲህም አለ (2x)</a:t>
+              <a:t>ኧረ እንዲህም አለ አምልኮ ኧረ እንዲህም አለ 2x</a:t>
             </a:r>
           </a:p>
           <a:p>
@@ -4118,7 +4118,7 @@
                 <a:ea typeface="Ebrima"/>
                 <a:cs typeface="Ebrima"/>
               </a:rPr>
-              <a:t>ኧረ እንዲህም አለ ዕልልታ ኧረ እንዲህም አለ (2x)</a:t>
+              <a:t>ኧረ እንዲህም አለ ዕልልታ ኧረ እንዲህም አለ 2x</a:t>
             </a:r>
           </a:p>
         </p:txBody>
@@ -4185,7 +4185,7 @@
                 <a:ea typeface="Ebrima"/>
                 <a:cs typeface="Ebrima"/>
               </a:rPr>
-              <a:t>ኧረ እንዲህም አለ አምልኮ ኧረ እንዲህም አለ (2x)</a:t>
+              <a:t>ኧረ እንዲህም አለ አምልኮ ኧረ እንዲህም አለ 2x</a:t>
             </a:r>
           </a:p>
           <a:p>
@@ -4203,7 +4203,7 @@
                 <a:ea typeface="Ebrima"/>
                 <a:cs typeface="Ebrima"/>
               </a:rPr>
-              <a:t>ኧረ እንዲህም አለ ዕልልታ ኧረ እንዲህም አለ (2x)</a:t>
+              <a:t>ኧረ እንዲህም አለ ዕልልታ ኧረ እንዲህም አለ 2x</a:t>
             </a:r>
           </a:p>
         </p:txBody>
